--- a/2025/LEC/07-2 RNN.pptx
+++ b/2025/LEC/07-2 RNN.pptx
@@ -23,6 +23,8 @@
     <p:sldId id="451" r:id="rId17"/>
     <p:sldId id="452" r:id="rId18"/>
     <p:sldId id="453" r:id="rId19"/>
+    <p:sldId id="455" r:id="rId20"/>
+    <p:sldId id="454" r:id="rId21"/>
   </p:sldIdLst>
   <p:sldSz cx="12192000" cy="6858000"/>
   <p:notesSz cx="6858000" cy="9144000"/>
@@ -278,7 +280,7 @@
           <a:p>
             <a:fld id="{A76E1671-358D-4BAB-9EB2-DC8D65251B89}" type="datetimeFigureOut">
               <a:rPr lang="en-US" smtClean="0"/>
-              <a:t>8/15/2025</a:t>
+              <a:t>8/29/2025</a:t>
             </a:fld>
             <a:endParaRPr lang="en-US"/>
           </a:p>
@@ -478,7 +480,7 @@
           <a:p>
             <a:fld id="{A76E1671-358D-4BAB-9EB2-DC8D65251B89}" type="datetimeFigureOut">
               <a:rPr lang="en-US" smtClean="0"/>
-              <a:t>8/15/2025</a:t>
+              <a:t>8/29/2025</a:t>
             </a:fld>
             <a:endParaRPr lang="en-US"/>
           </a:p>
@@ -688,7 +690,7 @@
           <a:p>
             <a:fld id="{A76E1671-358D-4BAB-9EB2-DC8D65251B89}" type="datetimeFigureOut">
               <a:rPr lang="en-US" smtClean="0"/>
-              <a:t>8/15/2025</a:t>
+              <a:t>8/29/2025</a:t>
             </a:fld>
             <a:endParaRPr lang="en-US"/>
           </a:p>
@@ -888,7 +890,7 @@
           <a:p>
             <a:fld id="{A76E1671-358D-4BAB-9EB2-DC8D65251B89}" type="datetimeFigureOut">
               <a:rPr lang="en-US" smtClean="0"/>
-              <a:t>8/15/2025</a:t>
+              <a:t>8/29/2025</a:t>
             </a:fld>
             <a:endParaRPr lang="en-US"/>
           </a:p>
@@ -1164,7 +1166,7 @@
           <a:p>
             <a:fld id="{A76E1671-358D-4BAB-9EB2-DC8D65251B89}" type="datetimeFigureOut">
               <a:rPr lang="en-US" smtClean="0"/>
-              <a:t>8/15/2025</a:t>
+              <a:t>8/29/2025</a:t>
             </a:fld>
             <a:endParaRPr lang="en-US"/>
           </a:p>
@@ -1432,7 +1434,7 @@
           <a:p>
             <a:fld id="{A76E1671-358D-4BAB-9EB2-DC8D65251B89}" type="datetimeFigureOut">
               <a:rPr lang="en-US" smtClean="0"/>
-              <a:t>8/15/2025</a:t>
+              <a:t>8/29/2025</a:t>
             </a:fld>
             <a:endParaRPr lang="en-US"/>
           </a:p>
@@ -1847,7 +1849,7 @@
           <a:p>
             <a:fld id="{A76E1671-358D-4BAB-9EB2-DC8D65251B89}" type="datetimeFigureOut">
               <a:rPr lang="en-US" smtClean="0"/>
-              <a:t>8/15/2025</a:t>
+              <a:t>8/29/2025</a:t>
             </a:fld>
             <a:endParaRPr lang="en-US"/>
           </a:p>
@@ -1989,7 +1991,7 @@
           <a:p>
             <a:fld id="{A76E1671-358D-4BAB-9EB2-DC8D65251B89}" type="datetimeFigureOut">
               <a:rPr lang="en-US" smtClean="0"/>
-              <a:t>8/15/2025</a:t>
+              <a:t>8/29/2025</a:t>
             </a:fld>
             <a:endParaRPr lang="en-US"/>
           </a:p>
@@ -2102,7 +2104,7 @@
           <a:p>
             <a:fld id="{A76E1671-358D-4BAB-9EB2-DC8D65251B89}" type="datetimeFigureOut">
               <a:rPr lang="en-US" smtClean="0"/>
-              <a:t>8/15/2025</a:t>
+              <a:t>8/29/2025</a:t>
             </a:fld>
             <a:endParaRPr lang="en-US"/>
           </a:p>
@@ -2415,7 +2417,7 @@
           <a:p>
             <a:fld id="{A76E1671-358D-4BAB-9EB2-DC8D65251B89}" type="datetimeFigureOut">
               <a:rPr lang="en-US" smtClean="0"/>
-              <a:t>8/15/2025</a:t>
+              <a:t>8/29/2025</a:t>
             </a:fld>
             <a:endParaRPr lang="en-US"/>
           </a:p>
@@ -2704,7 +2706,7 @@
           <a:p>
             <a:fld id="{A76E1671-358D-4BAB-9EB2-DC8D65251B89}" type="datetimeFigureOut">
               <a:rPr lang="en-US" smtClean="0"/>
-              <a:t>8/15/2025</a:t>
+              <a:t>8/29/2025</a:t>
             </a:fld>
             <a:endParaRPr lang="en-US"/>
           </a:p>
@@ -2947,7 +2949,7 @@
           <a:p>
             <a:fld id="{A76E1671-358D-4BAB-9EB2-DC8D65251B89}" type="datetimeFigureOut">
               <a:rPr lang="en-US" smtClean="0"/>
-              <a:t>8/15/2025</a:t>
+              <a:t>8/29/2025</a:t>
             </a:fld>
             <a:endParaRPr lang="en-US"/>
           </a:p>
@@ -3695,7 +3697,7 @@
         </p:nvSpPr>
         <p:spPr>
           <a:xfrm>
-            <a:off x="228600" y="365126"/>
+            <a:off x="294658" y="127001"/>
             <a:ext cx="11258550" cy="720724"/>
           </a:xfrm>
         </p:spPr>
@@ -3705,18 +3707,22 @@
           <a:p>
             <a:r>
               <a:rPr lang="en-US" dirty="0" err="1" smtClean="0"/>
-              <a:t>BiDirextional</a:t>
+              <a:t>BiDiretional</a:t>
             </a:r>
             <a:r>
               <a:rPr lang="en-US" dirty="0" smtClean="0"/>
-              <a:t> RNN</a:t>
+              <a:t> </a:t>
+            </a:r>
+            <a:r>
+              <a:rPr lang="en-US" dirty="0" smtClean="0"/>
+              <a:t>RNN</a:t>
             </a:r>
             <a:endParaRPr lang="ru-RU" dirty="0"/>
           </a:p>
         </p:txBody>
       </p:sp>
-      <mc:AlternateContent xmlns:mc="http://schemas.openxmlformats.org/markup-compatibility/2006">
-        <mc:Choice xmlns:a14="http://schemas.microsoft.com/office/drawing/2010/main" Requires="a14">
+      <mc:AlternateContent xmlns:mc="http://schemas.openxmlformats.org/markup-compatibility/2006" xmlns:a14="http://schemas.microsoft.com/office/drawing/2010/main">
+        <mc:Choice Requires="a14">
           <p:sp>
             <p:nvSpPr>
               <p:cNvPr id="3" name="Объект 2"/>
@@ -4466,7 +4472,7 @@
             </p:txBody>
           </p:sp>
         </mc:Choice>
-        <mc:Fallback>
+        <mc:Fallback xmlns="">
           <p:sp>
             <p:nvSpPr>
               <p:cNvPr id="3" name="Объект 2"/>
@@ -4528,8 +4534,8 @@
           </a:prstGeom>
         </p:spPr>
       </p:pic>
-      <mc:AlternateContent xmlns:mc="http://schemas.openxmlformats.org/markup-compatibility/2006">
-        <mc:Choice xmlns:a14="http://schemas.microsoft.com/office/drawing/2010/main" Requires="a14">
+      <mc:AlternateContent xmlns:mc="http://schemas.openxmlformats.org/markup-compatibility/2006" xmlns:a14="http://schemas.microsoft.com/office/drawing/2010/main">
+        <mc:Choice Requires="a14">
           <p:sp>
             <p:nvSpPr>
               <p:cNvPr id="8" name="Объект 2"/>
@@ -4901,7 +4907,7 @@
             </p:txBody>
           </p:sp>
         </mc:Choice>
-        <mc:Fallback>
+        <mc:Fallback xmlns="">
           <p:sp>
             <p:nvSpPr>
               <p:cNvPr id="8" name="Объект 2"/>
@@ -5032,11 +5038,11 @@
   <p:clrMapOvr>
     <a:masterClrMapping/>
   </p:clrMapOvr>
-  <mc:AlternateContent xmlns:mc="http://schemas.openxmlformats.org/markup-compatibility/2006">
-    <mc:Choice xmlns:p14="http://schemas.microsoft.com/office/powerpoint/2010/main" Requires="p14">
+  <mc:AlternateContent xmlns:mc="http://schemas.openxmlformats.org/markup-compatibility/2006" xmlns:p14="http://schemas.microsoft.com/office/powerpoint/2010/main">
+    <mc:Choice Requires="p14">
       <p:transition spd="slow" p14:dur="2000"/>
     </mc:Choice>
-    <mc:Fallback>
+    <mc:Fallback xmlns="">
       <p:transition spd="slow"/>
     </mc:Fallback>
   </mc:AlternateContent>
@@ -5079,7 +5085,7 @@
         </p:nvSpPr>
         <p:spPr>
           <a:xfrm>
-            <a:off x="838200" y="365125"/>
+            <a:off x="838200" y="257857"/>
             <a:ext cx="10515600" cy="758825"/>
           </a:xfrm>
         </p:spPr>
@@ -5296,11 +5302,11 @@
   <p:clrMapOvr>
     <a:masterClrMapping/>
   </p:clrMapOvr>
-  <mc:AlternateContent xmlns:mc="http://schemas.openxmlformats.org/markup-compatibility/2006">
-    <mc:Choice xmlns:p14="http://schemas.microsoft.com/office/powerpoint/2010/main" Requires="p14">
+  <mc:AlternateContent xmlns:mc="http://schemas.openxmlformats.org/markup-compatibility/2006" xmlns:p14="http://schemas.microsoft.com/office/powerpoint/2010/main">
+    <mc:Choice Requires="p14">
       <p:transition spd="slow" p14:dur="2000"/>
     </mc:Choice>
-    <mc:Fallback>
+    <mc:Fallback xmlns="">
       <p:transition spd="slow"/>
     </mc:Fallback>
   </mc:AlternateContent>
@@ -5797,8 +5803,8 @@
           </a:p>
         </p:txBody>
       </p:sp>
-      <mc:AlternateContent xmlns:mc="http://schemas.openxmlformats.org/markup-compatibility/2006">
-        <mc:Choice xmlns:a14="http://schemas.microsoft.com/office/drawing/2010/main" Requires="a14">
+      <mc:AlternateContent xmlns:mc="http://schemas.openxmlformats.org/markup-compatibility/2006" xmlns:a14="http://schemas.microsoft.com/office/drawing/2010/main">
+        <mc:Choice Requires="a14">
           <p:sp>
             <p:nvSpPr>
               <p:cNvPr id="3" name="Объект 2"/>
@@ -6782,7 +6788,7 @@
                       <m:sSub>
                         <m:sSubPr>
                           <m:ctrlPr>
-                            <a:rPr lang="ru-RU" sz="2200" b="0" i="0" smtClean="0">
+                            <a:rPr lang="ru-RU" sz="2200" b="0" i="1" smtClean="0">
                               <a:latin typeface="Cambria Math" panose="02040503050406030204" pitchFamily="18" charset="0"/>
                             </a:rPr>
                           </m:ctrlPr>
@@ -7384,7 +7390,7 @@
             </p:txBody>
           </p:sp>
         </mc:Choice>
-        <mc:Fallback>
+        <mc:Fallback xmlns="">
           <p:sp>
             <p:nvSpPr>
               <p:cNvPr id="3" name="Объект 2"/>
@@ -7538,8 +7544,8 @@
           </a:p>
         </p:txBody>
       </p:sp>
-      <mc:AlternateContent xmlns:mc="http://schemas.openxmlformats.org/markup-compatibility/2006">
-        <mc:Choice xmlns:a14="http://schemas.microsoft.com/office/drawing/2010/main" Requires="a14">
+      <mc:AlternateContent xmlns:mc="http://schemas.openxmlformats.org/markup-compatibility/2006" xmlns:a14="http://schemas.microsoft.com/office/drawing/2010/main">
+        <mc:Choice Requires="a14">
           <p:sp>
             <p:nvSpPr>
               <p:cNvPr id="3" name="Объект 2"/>
@@ -8130,7 +8136,7 @@
             </p:txBody>
           </p:sp>
         </mc:Choice>
-        <mc:Fallback>
+        <mc:Fallback xmlns="">
           <p:sp>
             <p:nvSpPr>
               <p:cNvPr id="3" name="Объект 2"/>
@@ -8264,7 +8270,7 @@
         </p:nvSpPr>
         <p:spPr>
           <a:xfrm>
-            <a:off x="245807" y="266804"/>
+            <a:off x="245807" y="116459"/>
             <a:ext cx="11127658" cy="568940"/>
           </a:xfrm>
         </p:spPr>
@@ -8591,7 +8597,7 @@
         </p:nvSpPr>
         <p:spPr>
           <a:xfrm>
-            <a:off x="235974" y="365126"/>
+            <a:off x="235972" y="217642"/>
             <a:ext cx="11117826" cy="726256"/>
           </a:xfrm>
         </p:spPr>
@@ -8601,6 +8607,7 @@
           </a:bodyPr>
           <a:lstStyle/>
           <a:p>
+            <a:pPr algn="ctr"/>
             <a:r>
               <a:rPr lang="en-US" dirty="0"/>
               <a:t>Gated Recurrent </a:t>
@@ -8613,8 +8620,8 @@
           </a:p>
         </p:txBody>
       </p:sp>
-      <mc:AlternateContent xmlns:mc="http://schemas.openxmlformats.org/markup-compatibility/2006">
-        <mc:Choice xmlns:a14="http://schemas.microsoft.com/office/drawing/2010/main" Requires="a14">
+      <mc:AlternateContent xmlns:mc="http://schemas.openxmlformats.org/markup-compatibility/2006" xmlns:a14="http://schemas.microsoft.com/office/drawing/2010/main">
+        <mc:Choice Requires="a14">
           <p:sp>
             <p:nvSpPr>
               <p:cNvPr id="3" name="Объект 2"/>
@@ -10024,7 +10031,7 @@
             </p:txBody>
           </p:sp>
         </mc:Choice>
-        <mc:Fallback>
+        <mc:Fallback xmlns="">
           <p:sp>
             <p:nvSpPr>
               <p:cNvPr id="3" name="Объект 2"/>
@@ -10165,7 +10172,7 @@
           <a:bodyPr/>
           <a:lstStyle/>
           <a:p>
-            <a:endParaRPr lang="ru-RU"/>
+            <a:endParaRPr lang="ru-RU" dirty="0"/>
           </a:p>
         </p:txBody>
       </p:sp>
@@ -10322,6 +10329,427 @@
 </p:sld>
 </file>
 
+<file path=ppt/slides/slide19.xml><?xml version="1.0" encoding="utf-8"?>
+<p:sld xmlns:a="http://schemas.openxmlformats.org/drawingml/2006/main" xmlns:r="http://schemas.openxmlformats.org/officeDocument/2006/relationships" xmlns:p="http://schemas.openxmlformats.org/presentationml/2006/main">
+  <p:cSld>
+    <p:spTree>
+      <p:nvGrpSpPr>
+        <p:cNvPr id="1" name=""/>
+        <p:cNvGrpSpPr/>
+        <p:nvPr/>
+      </p:nvGrpSpPr>
+      <p:grpSpPr>
+        <a:xfrm>
+          <a:off x="0" y="0"/>
+          <a:ext cx="0" cy="0"/>
+          <a:chOff x="0" y="0"/>
+          <a:chExt cx="0" cy="0"/>
+        </a:xfrm>
+      </p:grpSpPr>
+      <p:sp>
+        <p:nvSpPr>
+          <p:cNvPr id="2" name="Заголовок 1"/>
+          <p:cNvSpPr>
+            <a:spLocks noGrp="1"/>
+          </p:cNvSpPr>
+          <p:nvPr>
+            <p:ph type="title"/>
+          </p:nvPr>
+        </p:nvSpPr>
+        <p:spPr>
+          <a:xfrm>
+            <a:off x="460375" y="173622"/>
+            <a:ext cx="6189031" cy="791736"/>
+          </a:xfrm>
+        </p:spPr>
+        <p:txBody>
+          <a:bodyPr/>
+          <a:lstStyle/>
+          <a:p>
+            <a:pPr algn="ctr"/>
+            <a:r>
+              <a:rPr lang="en-US" dirty="0" smtClean="0"/>
+              <a:t>ESRNN</a:t>
+            </a:r>
+            <a:endParaRPr lang="ru-RU" dirty="0"/>
+          </a:p>
+        </p:txBody>
+      </p:sp>
+      <p:sp>
+        <p:nvSpPr>
+          <p:cNvPr id="3" name="Объект 2"/>
+          <p:cNvSpPr>
+            <a:spLocks noGrp="1"/>
+          </p:cNvSpPr>
+          <p:nvPr>
+            <p:ph idx="1"/>
+          </p:nvPr>
+        </p:nvSpPr>
+        <p:spPr>
+          <a:xfrm>
+            <a:off x="155575" y="1016001"/>
+            <a:ext cx="6456533" cy="5772150"/>
+          </a:xfrm>
+        </p:spPr>
+        <p:txBody>
+          <a:bodyPr>
+            <a:normAutofit fontScale="92500" lnSpcReduction="10000"/>
+          </a:bodyPr>
+          <a:lstStyle/>
+          <a:p>
+            <a:pPr marL="0" indent="0">
+              <a:buNone/>
+            </a:pPr>
+            <a:r>
+              <a:rPr lang="ru-RU" sz="2400" b="1" dirty="0" smtClean="0"/>
+              <a:t>Гибридная модель</a:t>
+            </a:r>
+          </a:p>
+          <a:p>
+            <a:r>
+              <a:rPr lang="ru-RU" sz="2400" dirty="0" smtClean="0"/>
+              <a:t>Часто часть ВР можно описать классически.</a:t>
+            </a:r>
+          </a:p>
+          <a:p>
+            <a:r>
+              <a:rPr lang="ru-RU" sz="2400" b="1" dirty="0" smtClean="0"/>
+              <a:t>Гипотеза</a:t>
+            </a:r>
+            <a:r>
+              <a:rPr lang="ru-RU" sz="2400" dirty="0" smtClean="0"/>
+              <a:t>: остаток ВР можно описать </a:t>
+            </a:r>
+            <a:r>
+              <a:rPr lang="en-US" sz="2400" dirty="0" smtClean="0"/>
+              <a:t>RNN</a:t>
+            </a:r>
+          </a:p>
+          <a:p>
+            <a:r>
+              <a:rPr lang="ru-RU" sz="2400" dirty="0" smtClean="0"/>
+              <a:t>Модель </a:t>
+            </a:r>
+            <a:r>
+              <a:rPr lang="en-US" sz="2400" dirty="0" smtClean="0"/>
+              <a:t>ES RNN </a:t>
+            </a:r>
+            <a:r>
+              <a:rPr lang="ru-RU" sz="2400" dirty="0" smtClean="0"/>
+              <a:t> описывает уровень и сезонность при помощи </a:t>
+            </a:r>
+            <a:r>
+              <a:rPr lang="en-US" sz="2400" dirty="0" smtClean="0"/>
+              <a:t>ETS (HW).</a:t>
+            </a:r>
+          </a:p>
+          <a:p>
+            <a:r>
+              <a:rPr lang="ru-RU" sz="2400" dirty="0" smtClean="0"/>
+              <a:t>Мультипликативный остаток описывается </a:t>
+            </a:r>
+            <a:r>
+              <a:rPr lang="en-US" sz="2400" dirty="0" smtClean="0"/>
+              <a:t>LSTM.</a:t>
+            </a:r>
+          </a:p>
+          <a:p>
+            <a:pPr lvl="1"/>
+            <a:r>
+              <a:rPr lang="en-US" sz="2000" dirty="0" smtClean="0"/>
+              <a:t>LSTM temporal</a:t>
+            </a:r>
+          </a:p>
+          <a:p>
+            <a:r>
+              <a:rPr lang="ru-RU" sz="2400" dirty="0" smtClean="0"/>
+              <a:t>Подбор параметров обоих алгоритмов проводится совместно.</a:t>
+            </a:r>
+          </a:p>
+          <a:p>
+            <a:pPr marL="0" indent="0">
+              <a:buNone/>
+            </a:pPr>
+            <a:r>
+              <a:rPr lang="ru-RU" b="1" dirty="0"/>
+              <a:t>Преимущества:</a:t>
+            </a:r>
+            <a:endParaRPr lang="ru-RU" dirty="0"/>
+          </a:p>
+          <a:p>
+            <a:pPr lvl="1"/>
+            <a:r>
+              <a:rPr lang="ru-RU" b="1" dirty="0"/>
+              <a:t>Интерпретируемость:</a:t>
+            </a:r>
+            <a:r>
+              <a:rPr lang="ru-RU" dirty="0"/>
+              <a:t> </a:t>
+            </a:r>
+            <a:r>
+              <a:rPr lang="ru-RU" dirty="0" smtClean="0"/>
+              <a:t> </a:t>
+            </a:r>
+            <a:r>
+              <a:rPr lang="ru-RU" dirty="0"/>
+              <a:t>в </a:t>
+            </a:r>
+            <a:r>
+              <a:rPr lang="ru-RU" dirty="0" smtClean="0"/>
+              <a:t>классическом </a:t>
+            </a:r>
+            <a:r>
+              <a:rPr lang="ru-RU" dirty="0"/>
+              <a:t>ETS.</a:t>
+            </a:r>
+          </a:p>
+          <a:p>
+            <a:pPr lvl="1"/>
+            <a:r>
+              <a:rPr lang="ru-RU" b="1" dirty="0"/>
+              <a:t>Гибкость:</a:t>
+            </a:r>
+            <a:r>
+              <a:rPr lang="ru-RU" dirty="0"/>
+              <a:t> Модель сама учится, какие компоненты (</a:t>
+            </a:r>
+            <a:r>
+              <a:rPr lang="ru-RU" dirty="0" err="1"/>
+              <a:t>Error</a:t>
+            </a:r>
+            <a:r>
+              <a:rPr lang="ru-RU" dirty="0"/>
+              <a:t>, </a:t>
+            </a:r>
+            <a:r>
+              <a:rPr lang="ru-RU" dirty="0" err="1"/>
+              <a:t>Trend</a:t>
+            </a:r>
+            <a:r>
+              <a:rPr lang="ru-RU" dirty="0"/>
+              <a:t>, </a:t>
+            </a:r>
+            <a:r>
+              <a:rPr lang="ru-RU" dirty="0" err="1"/>
+              <a:t>Seasonality</a:t>
+            </a:r>
+            <a:r>
+              <a:rPr lang="ru-RU" dirty="0"/>
+              <a:t>) и их тип </a:t>
+            </a:r>
+            <a:r>
+              <a:rPr lang="ru-RU" dirty="0" smtClean="0"/>
+              <a:t>важны </a:t>
+            </a:r>
+            <a:r>
+              <a:rPr lang="ru-RU" dirty="0"/>
+              <a:t>для ряда</a:t>
+            </a:r>
+            <a:r>
+              <a:rPr lang="ru-RU" dirty="0" smtClean="0"/>
+              <a:t>.</a:t>
+            </a:r>
+          </a:p>
+          <a:p>
+            <a:pPr lvl="1"/>
+            <a:r>
+              <a:rPr lang="ru-RU" b="1" dirty="0" err="1"/>
+              <a:t>Н</a:t>
+            </a:r>
+            <a:r>
+              <a:rPr lang="ru-RU" b="1" dirty="0" err="1" smtClean="0"/>
+              <a:t>еизбыточность</a:t>
+            </a:r>
+            <a:r>
+              <a:rPr lang="ru-RU" dirty="0" smtClean="0"/>
+              <a:t> - </a:t>
+            </a:r>
+            <a:r>
+              <a:rPr lang="en-US" dirty="0" smtClean="0"/>
+              <a:t>RNN </a:t>
+            </a:r>
+            <a:r>
+              <a:rPr lang="ru-RU" dirty="0" smtClean="0"/>
+              <a:t>только там, где она нужна.</a:t>
+            </a:r>
+            <a:endParaRPr lang="ru-RU" dirty="0"/>
+          </a:p>
+        </p:txBody>
+      </p:sp>
+      <p:sp>
+        <p:nvSpPr>
+          <p:cNvPr id="4" name="AutoShape 2" descr="https://miro.medium.com/v2/resize:fit:875/1*E-9obpPKnIRRAjZu9drfMg.png"/>
+          <p:cNvSpPr>
+            <a:spLocks noChangeAspect="1" noChangeArrowheads="1"/>
+          </p:cNvSpPr>
+          <p:nvPr/>
+        </p:nvSpPr>
+        <p:spPr bwMode="auto">
+          <a:xfrm>
+            <a:off x="155575" y="-144463"/>
+            <a:ext cx="304800" cy="304801"/>
+          </a:xfrm>
+          <a:prstGeom prst="rect">
+            <a:avLst/>
+          </a:prstGeom>
+          <a:noFill/>
+          <a:extLst>
+            <a:ext uri="{909E8E84-426E-40DD-AFC4-6F175D3DCCD1}">
+              <a14:hiddenFill xmlns:a14="http://schemas.microsoft.com/office/drawing/2010/main">
+                <a:solidFill>
+                  <a:srgbClr val="FFFFFF"/>
+                </a:solidFill>
+              </a14:hiddenFill>
+            </a:ext>
+          </a:extLst>
+        </p:spPr>
+        <p:txBody>
+          <a:bodyPr vert="horz" wrap="square" lIns="91440" tIns="45720" rIns="91440" bIns="45720" numCol="1" anchor="t" anchorCtr="0" compatLnSpc="1">
+            <a:prstTxWarp prst="textNoShape">
+              <a:avLst/>
+            </a:prstTxWarp>
+          </a:bodyPr>
+          <a:lstStyle/>
+          <a:p>
+            <a:endParaRPr lang="ru-RU"/>
+          </a:p>
+        </p:txBody>
+      </p:sp>
+      <p:pic>
+        <p:nvPicPr>
+          <p:cNvPr id="6" name="Рисунок 5"/>
+          <p:cNvPicPr>
+            <a:picLocks noChangeAspect="1"/>
+          </p:cNvPicPr>
+          <p:nvPr/>
+        </p:nvPicPr>
+        <p:blipFill>
+          <a:blip r:embed="rId2"/>
+          <a:stretch>
+            <a:fillRect/>
+          </a:stretch>
+        </p:blipFill>
+        <p:spPr>
+          <a:xfrm>
+            <a:off x="6649406" y="4241025"/>
+            <a:ext cx="5514096" cy="1409700"/>
+          </a:xfrm>
+          <a:prstGeom prst="rect">
+            <a:avLst/>
+          </a:prstGeom>
+        </p:spPr>
+      </p:pic>
+      <p:sp>
+        <p:nvSpPr>
+          <p:cNvPr id="7" name="Прямоугольник 6"/>
+          <p:cNvSpPr/>
+          <p:nvPr/>
+        </p:nvSpPr>
+        <p:spPr>
+          <a:xfrm>
+            <a:off x="6535487" y="6455745"/>
+            <a:ext cx="4365041" cy="369332"/>
+          </a:xfrm>
+          <a:prstGeom prst="rect">
+            <a:avLst/>
+          </a:prstGeom>
+        </p:spPr>
+        <p:txBody>
+          <a:bodyPr wrap="none">
+            <a:spAutoFit/>
+          </a:bodyPr>
+          <a:lstStyle/>
+          <a:p>
+            <a:r>
+              <a:rPr lang="en-US" dirty="0"/>
+              <a:t>https://ar5iv.labs.arxiv.org/html/1907.03329</a:t>
+            </a:r>
+            <a:endParaRPr lang="ru-RU" dirty="0"/>
+          </a:p>
+        </p:txBody>
+      </p:sp>
+      <p:pic>
+        <p:nvPicPr>
+          <p:cNvPr id="1028" name="Picture 4" descr="Refer to caption"/>
+          <p:cNvPicPr>
+            <a:picLocks noChangeAspect="1" noChangeArrowheads="1"/>
+          </p:cNvPicPr>
+          <p:nvPr/>
+        </p:nvPicPr>
+        <p:blipFill>
+          <a:blip r:embed="rId3" cstate="hqprint">
+            <a:extLst>
+              <a:ext uri="{28A0092B-C50C-407E-A947-70E740481C1C}">
+                <a14:useLocalDpi xmlns:a14="http://schemas.microsoft.com/office/drawing/2010/main" val="0"/>
+              </a:ext>
+            </a:extLst>
+          </a:blip>
+          <a:srcRect/>
+          <a:stretch>
+            <a:fillRect/>
+          </a:stretch>
+        </p:blipFill>
+        <p:spPr bwMode="auto">
+          <a:xfrm>
+            <a:off x="6612108" y="253177"/>
+            <a:ext cx="5197574" cy="3648899"/>
+          </a:xfrm>
+          <a:prstGeom prst="rect">
+            <a:avLst/>
+          </a:prstGeom>
+          <a:noFill/>
+          <a:extLst>
+            <a:ext uri="{909E8E84-426E-40DD-AFC4-6F175D3DCCD1}">
+              <a14:hiddenFill xmlns:a14="http://schemas.microsoft.com/office/drawing/2010/main">
+                <a:solidFill>
+                  <a:srgbClr val="FFFFFF"/>
+                </a:solidFill>
+              </a14:hiddenFill>
+            </a:ext>
+          </a:extLst>
+        </p:spPr>
+      </p:pic>
+      <p:sp>
+        <p:nvSpPr>
+          <p:cNvPr id="5" name="Прямоугольник 4"/>
+          <p:cNvSpPr/>
+          <p:nvPr/>
+        </p:nvSpPr>
+        <p:spPr>
+          <a:xfrm>
+            <a:off x="118277" y="6511151"/>
+            <a:ext cx="6096000" cy="276999"/>
+          </a:xfrm>
+          <a:prstGeom prst="rect">
+            <a:avLst/>
+          </a:prstGeom>
+        </p:spPr>
+        <p:txBody>
+          <a:bodyPr>
+            <a:spAutoFit/>
+          </a:bodyPr>
+          <a:lstStyle/>
+          <a:p>
+            <a:r>
+              <a:rPr lang="ru-RU" sz="1200" dirty="0"/>
+              <a:t>https://www.sciencedirect.com/science/article/abs/pii/S0169207019301153</a:t>
+            </a:r>
+          </a:p>
+        </p:txBody>
+      </p:sp>
+    </p:spTree>
+    <p:extLst>
+      <p:ext uri="{BB962C8B-B14F-4D97-AF65-F5344CB8AC3E}">
+        <p14:creationId xmlns:p14="http://schemas.microsoft.com/office/powerpoint/2010/main" val="1171104952"/>
+      </p:ext>
+    </p:extLst>
+  </p:cSld>
+  <p:clrMapOvr>
+    <a:masterClrMapping/>
+  </p:clrMapOvr>
+</p:sld>
+</file>
+
 <file path=ppt/slides/slide2.xml><?xml version="1.0" encoding="utf-8"?>
 <p:sld xmlns:a="http://schemas.openxmlformats.org/drawingml/2006/main" xmlns:r="http://schemas.openxmlformats.org/officeDocument/2006/relationships" xmlns:p="http://schemas.openxmlformats.org/presentationml/2006/main">
   <p:cSld>
@@ -10669,6 +11097,462 @@
       </p:par>
     </p:tnLst>
   </p:timing>
+</p:sld>
+</file>
+
+<file path=ppt/slides/slide20.xml><?xml version="1.0" encoding="utf-8"?>
+<p:sld xmlns:a="http://schemas.openxmlformats.org/drawingml/2006/main" xmlns:r="http://schemas.openxmlformats.org/officeDocument/2006/relationships" xmlns:p="http://schemas.openxmlformats.org/presentationml/2006/main">
+  <p:cSld>
+    <p:spTree>
+      <p:nvGrpSpPr>
+        <p:cNvPr id="1" name=""/>
+        <p:cNvGrpSpPr/>
+        <p:nvPr/>
+      </p:nvGrpSpPr>
+      <p:grpSpPr>
+        <a:xfrm>
+          <a:off x="0" y="0"/>
+          <a:ext cx="0" cy="0"/>
+          <a:chOff x="0" y="0"/>
+          <a:chExt cx="0" cy="0"/>
+        </a:xfrm>
+      </p:grpSpPr>
+      <p:sp>
+        <p:nvSpPr>
+          <p:cNvPr id="2" name="Заголовок 1"/>
+          <p:cNvSpPr>
+            <a:spLocks noGrp="1"/>
+          </p:cNvSpPr>
+          <p:nvPr>
+            <p:ph type="title"/>
+          </p:nvPr>
+        </p:nvSpPr>
+        <p:spPr>
+          <a:xfrm>
+            <a:off x="250904" y="52891"/>
+            <a:ext cx="6623824" cy="660787"/>
+          </a:xfrm>
+        </p:spPr>
+        <p:txBody>
+          <a:bodyPr>
+            <a:normAutofit fontScale="90000"/>
+          </a:bodyPr>
+          <a:lstStyle/>
+          <a:p>
+            <a:pPr algn="ctr"/>
+            <a:r>
+              <a:rPr lang="en-US" dirty="0" smtClean="0"/>
+              <a:t>Deep AR</a:t>
+            </a:r>
+            <a:endParaRPr lang="ru-RU" dirty="0"/>
+          </a:p>
+        </p:txBody>
+      </p:sp>
+      <p:sp>
+        <p:nvSpPr>
+          <p:cNvPr id="3" name="Объект 2"/>
+          <p:cNvSpPr>
+            <a:spLocks noGrp="1"/>
+          </p:cNvSpPr>
+          <p:nvPr>
+            <p:ph idx="1"/>
+          </p:nvPr>
+        </p:nvSpPr>
+        <p:spPr>
+          <a:xfrm>
+            <a:off x="101235" y="602806"/>
+            <a:ext cx="6846849" cy="5985889"/>
+          </a:xfrm>
+        </p:spPr>
+        <p:txBody>
+          <a:bodyPr>
+            <a:normAutofit fontScale="85000" lnSpcReduction="20000"/>
+          </a:bodyPr>
+          <a:lstStyle/>
+          <a:p>
+            <a:pPr marL="0" indent="0">
+              <a:lnSpc>
+                <a:spcPct val="120000"/>
+              </a:lnSpc>
+              <a:spcBef>
+                <a:spcPts val="0"/>
+              </a:spcBef>
+              <a:buNone/>
+            </a:pPr>
+            <a:r>
+              <a:rPr lang="ru-RU" sz="2500" b="1" dirty="0" smtClean="0"/>
+              <a:t>Преимущества, особенности</a:t>
+            </a:r>
+          </a:p>
+          <a:p>
+            <a:pPr>
+              <a:lnSpc>
+                <a:spcPct val="120000"/>
+              </a:lnSpc>
+              <a:spcBef>
+                <a:spcPts val="0"/>
+              </a:spcBef>
+            </a:pPr>
+            <a:r>
+              <a:rPr lang="ru-RU" sz="2500" dirty="0" smtClean="0"/>
+              <a:t>Вероятностное </a:t>
+            </a:r>
+            <a:r>
+              <a:rPr lang="ru-RU" sz="2500" dirty="0"/>
+              <a:t>предсказание: </a:t>
+            </a:r>
+            <a:r>
+              <a:rPr lang="ru-RU" sz="2500" dirty="0" smtClean="0"/>
+              <a:t>предсказывает </a:t>
+            </a:r>
+            <a:r>
+              <a:rPr lang="ru-RU" sz="2500" dirty="0"/>
+              <a:t>распределение (например, нормальное, отрицательное биномиальное</a:t>
+            </a:r>
+            <a:r>
+              <a:rPr lang="ru-RU" sz="2500" dirty="0" smtClean="0"/>
+              <a:t>). Предсказание – медиана распределения.</a:t>
+            </a:r>
+          </a:p>
+          <a:p>
+            <a:pPr lvl="1">
+              <a:lnSpc>
+                <a:spcPct val="120000"/>
+              </a:lnSpc>
+              <a:spcBef>
+                <a:spcPts val="0"/>
+              </a:spcBef>
+            </a:pPr>
+            <a:r>
+              <a:rPr lang="ru-RU" sz="2500" dirty="0"/>
+              <a:t>Выбор распределение – подстройка к разным типам данных (напр. для счетных данных</a:t>
+            </a:r>
+            <a:r>
+              <a:rPr lang="ru-RU" sz="2500" dirty="0" smtClean="0"/>
+              <a:t>)</a:t>
+            </a:r>
+            <a:endParaRPr lang="en-US" sz="2500" dirty="0" smtClean="0"/>
+          </a:p>
+          <a:p>
+            <a:pPr lvl="1">
+              <a:lnSpc>
+                <a:spcPct val="120000"/>
+              </a:lnSpc>
+              <a:spcBef>
+                <a:spcPts val="0"/>
+              </a:spcBef>
+            </a:pPr>
+            <a:r>
+              <a:rPr lang="ru-RU" sz="2500" dirty="0" err="1" smtClean="0"/>
+              <a:t>Лосс</a:t>
+            </a:r>
+            <a:r>
+              <a:rPr lang="ru-RU" sz="2500" dirty="0" smtClean="0"/>
+              <a:t> – по распределению</a:t>
+            </a:r>
+            <a:endParaRPr lang="ru-RU" sz="2500" dirty="0"/>
+          </a:p>
+          <a:p>
+            <a:pPr>
+              <a:lnSpc>
+                <a:spcPct val="120000"/>
+              </a:lnSpc>
+              <a:spcBef>
+                <a:spcPts val="0"/>
+              </a:spcBef>
+            </a:pPr>
+            <a:r>
+              <a:rPr lang="ru-RU" sz="2500" dirty="0" smtClean="0"/>
+              <a:t>Авторегрессия на основе </a:t>
+            </a:r>
+            <a:r>
+              <a:rPr lang="en-US" sz="2500" dirty="0" smtClean="0"/>
+              <a:t>RNN </a:t>
+            </a:r>
+            <a:r>
+              <a:rPr lang="ru-RU" sz="2500" dirty="0" smtClean="0"/>
+              <a:t>моделирует динамику от времени.</a:t>
+            </a:r>
+          </a:p>
+          <a:p>
+            <a:pPr>
+              <a:lnSpc>
+                <a:spcPct val="120000"/>
+              </a:lnSpc>
+              <a:spcBef>
+                <a:spcPts val="0"/>
+              </a:spcBef>
+            </a:pPr>
+            <a:r>
+              <a:rPr lang="ru-RU" sz="2500" dirty="0" smtClean="0"/>
+              <a:t>Можно добавлять экзогенные факторы.</a:t>
+            </a:r>
+          </a:p>
+          <a:p>
+            <a:pPr marL="0" lvl="0" indent="0">
+              <a:lnSpc>
+                <a:spcPct val="120000"/>
+              </a:lnSpc>
+              <a:spcBef>
+                <a:spcPts val="0"/>
+              </a:spcBef>
+              <a:buNone/>
+            </a:pPr>
+            <a:r>
+              <a:rPr lang="ru-RU" sz="2500" b="1" dirty="0"/>
+              <a:t>Недостатки </a:t>
+            </a:r>
+            <a:r>
+              <a:rPr lang="ru-RU" sz="2500" b="1" dirty="0" err="1"/>
+              <a:t>DeepAR</a:t>
+            </a:r>
+            <a:endParaRPr lang="ru-RU" sz="2500" dirty="0"/>
+          </a:p>
+          <a:p>
+            <a:pPr lvl="1">
+              <a:lnSpc>
+                <a:spcPct val="120000"/>
+              </a:lnSpc>
+              <a:spcBef>
+                <a:spcPts val="0"/>
+              </a:spcBef>
+            </a:pPr>
+            <a:r>
+              <a:rPr lang="ru-RU" sz="2500" dirty="0"/>
+              <a:t>Требуется </a:t>
+            </a:r>
+            <a:r>
+              <a:rPr lang="ru-RU" sz="2500" dirty="0" smtClean="0"/>
+              <a:t>много данных для обучения.</a:t>
+            </a:r>
+            <a:endParaRPr lang="ru-RU" sz="2500" dirty="0"/>
+          </a:p>
+          <a:p>
+            <a:pPr lvl="1">
+              <a:lnSpc>
+                <a:spcPct val="120000"/>
+              </a:lnSpc>
+              <a:spcBef>
+                <a:spcPts val="0"/>
+              </a:spcBef>
+            </a:pPr>
+            <a:r>
+              <a:rPr lang="ru-RU" sz="2500" dirty="0"/>
+              <a:t>Нет настройки модели для отдельных </a:t>
+            </a:r>
+            <a:r>
+              <a:rPr lang="ru-RU" sz="2500" dirty="0" smtClean="0"/>
+              <a:t>ВР.</a:t>
+            </a:r>
+            <a:endParaRPr lang="ru-RU" sz="2500" dirty="0"/>
+          </a:p>
+          <a:p>
+            <a:pPr lvl="1">
+              <a:lnSpc>
+                <a:spcPct val="120000"/>
+              </a:lnSpc>
+              <a:spcBef>
+                <a:spcPts val="0"/>
+              </a:spcBef>
+            </a:pPr>
+            <a:r>
+              <a:rPr lang="ru-RU" sz="2500" dirty="0"/>
+              <a:t>Данные должны </a:t>
+            </a:r>
+            <a:r>
+              <a:rPr lang="ru-RU" sz="2500" dirty="0" smtClean="0"/>
+              <a:t>нормироваться.</a:t>
+            </a:r>
+            <a:endParaRPr lang="ru-RU" sz="2500" dirty="0"/>
+          </a:p>
+          <a:p>
+            <a:pPr lvl="1">
+              <a:lnSpc>
+                <a:spcPct val="120000"/>
+              </a:lnSpc>
+              <a:spcBef>
+                <a:spcPts val="0"/>
+              </a:spcBef>
+            </a:pPr>
+            <a:r>
+              <a:rPr lang="ru-RU" sz="2500" dirty="0"/>
+              <a:t>Позволяют получить сравнительно высокую производительность только на огромном объекте объединенных данных. </a:t>
+            </a:r>
+          </a:p>
+          <a:p>
+            <a:endParaRPr lang="ru-RU" sz="2400" dirty="0" smtClean="0"/>
+          </a:p>
+        </p:txBody>
+      </p:sp>
+      <p:pic>
+        <p:nvPicPr>
+          <p:cNvPr id="4" name="Рисунок 3"/>
+          <p:cNvPicPr>
+            <a:picLocks noChangeAspect="1"/>
+          </p:cNvPicPr>
+          <p:nvPr/>
+        </p:nvPicPr>
+        <p:blipFill rotWithShape="1">
+          <a:blip r:embed="rId2"/>
+          <a:srcRect l="4121"/>
+          <a:stretch/>
+        </p:blipFill>
+        <p:spPr>
+          <a:xfrm>
+            <a:off x="7002966" y="2738812"/>
+            <a:ext cx="5189034" cy="4119188"/>
+          </a:xfrm>
+          <a:prstGeom prst="rect">
+            <a:avLst/>
+          </a:prstGeom>
+        </p:spPr>
+      </p:pic>
+      <p:pic>
+        <p:nvPicPr>
+          <p:cNvPr id="5" name="Рисунок 4"/>
+          <p:cNvPicPr>
+            <a:picLocks noChangeAspect="1"/>
+          </p:cNvPicPr>
+          <p:nvPr/>
+        </p:nvPicPr>
+        <p:blipFill rotWithShape="1">
+          <a:blip r:embed="rId3"/>
+          <a:srcRect l="50607"/>
+          <a:stretch/>
+        </p:blipFill>
+        <p:spPr>
+          <a:xfrm>
+            <a:off x="6969514" y="0"/>
+            <a:ext cx="4902454" cy="2688102"/>
+          </a:xfrm>
+          <a:prstGeom prst="rect">
+            <a:avLst/>
+          </a:prstGeom>
+        </p:spPr>
+      </p:pic>
+      <p:sp>
+        <p:nvSpPr>
+          <p:cNvPr id="6" name="Прямоугольник 5"/>
+          <p:cNvSpPr/>
+          <p:nvPr/>
+        </p:nvSpPr>
+        <p:spPr>
+          <a:xfrm>
+            <a:off x="3855749" y="6631711"/>
+            <a:ext cx="4031296" cy="276999"/>
+          </a:xfrm>
+          <a:prstGeom prst="rect">
+            <a:avLst/>
+          </a:prstGeom>
+        </p:spPr>
+        <p:txBody>
+          <a:bodyPr wrap="none">
+            <a:spAutoFit/>
+          </a:bodyPr>
+          <a:lstStyle/>
+          <a:p>
+            <a:r>
+              <a:rPr lang="ru-RU" sz="1200" dirty="0"/>
+              <a:t>https://www.telesens.co/2019/06/08/time-series-prediction/</a:t>
+            </a:r>
+          </a:p>
+        </p:txBody>
+      </p:sp>
+      <p:sp>
+        <p:nvSpPr>
+          <p:cNvPr id="7" name="Прямоугольник 6"/>
+          <p:cNvSpPr/>
+          <p:nvPr/>
+        </p:nvSpPr>
+        <p:spPr>
+          <a:xfrm>
+            <a:off x="66905" y="6604084"/>
+            <a:ext cx="3823483" cy="261610"/>
+          </a:xfrm>
+          <a:prstGeom prst="rect">
+            <a:avLst/>
+          </a:prstGeom>
+        </p:spPr>
+        <p:txBody>
+          <a:bodyPr wrap="none">
+            <a:spAutoFit/>
+          </a:bodyPr>
+          <a:lstStyle/>
+          <a:p>
+            <a:r>
+              <a:rPr lang="ru-RU" sz="1100" dirty="0"/>
+              <a:t>https://blog.dataiku.com/deep-learning-time-series-forecasting</a:t>
+            </a:r>
+          </a:p>
+        </p:txBody>
+      </p:sp>
+      <p:sp>
+        <p:nvSpPr>
+          <p:cNvPr id="8" name="Прямоугольник 7"/>
+          <p:cNvSpPr/>
+          <p:nvPr/>
+        </p:nvSpPr>
+        <p:spPr>
+          <a:xfrm>
+            <a:off x="33453" y="6430263"/>
+            <a:ext cx="6096000" cy="261610"/>
+          </a:xfrm>
+          <a:prstGeom prst="rect">
+            <a:avLst/>
+          </a:prstGeom>
+        </p:spPr>
+        <p:txBody>
+          <a:bodyPr>
+            <a:spAutoFit/>
+          </a:bodyPr>
+          <a:lstStyle/>
+          <a:p>
+            <a:r>
+              <a:rPr lang="ru-RU" sz="1050" dirty="0" smtClean="0"/>
+              <a:t>https://readmedium.com/deepar-mastering-time-series-forecasting-with-deep-learning-bc717771ce85</a:t>
+            </a:r>
+            <a:endParaRPr lang="ru-RU" sz="1050" dirty="0"/>
+          </a:p>
+        </p:txBody>
+      </p:sp>
+      <p:sp>
+        <p:nvSpPr>
+          <p:cNvPr id="9" name="Прямоугольник 8"/>
+          <p:cNvSpPr/>
+          <p:nvPr/>
+        </p:nvSpPr>
+        <p:spPr>
+          <a:xfrm>
+            <a:off x="5743063" y="6422568"/>
+            <a:ext cx="2266646" cy="276999"/>
+          </a:xfrm>
+          <a:prstGeom prst="rect">
+            <a:avLst/>
+          </a:prstGeom>
+        </p:spPr>
+        <p:txBody>
+          <a:bodyPr wrap="none">
+            <a:spAutoFit/>
+          </a:bodyPr>
+          <a:lstStyle/>
+          <a:p>
+            <a:r>
+              <a:rPr lang="ru-RU" sz="1200" dirty="0"/>
+              <a:t>https://arxiv.org/pdf/1704.04110</a:t>
+            </a:r>
+          </a:p>
+        </p:txBody>
+      </p:sp>
+    </p:spTree>
+    <p:extLst>
+      <p:ext uri="{BB962C8B-B14F-4D97-AF65-F5344CB8AC3E}">
+        <p14:creationId xmlns:p14="http://schemas.microsoft.com/office/powerpoint/2010/main" val="1336971546"/>
+      </p:ext>
+    </p:extLst>
+  </p:cSld>
+  <p:clrMapOvr>
+    <a:masterClrMapping/>
+  </p:clrMapOvr>
 </p:sld>
 </file>
 
@@ -11668,8 +12552,8 @@
           </a:p>
         </p:txBody>
       </p:sp>
-      <mc:AlternateContent xmlns:mc="http://schemas.openxmlformats.org/markup-compatibility/2006">
-        <mc:Choice xmlns:a14="http://schemas.microsoft.com/office/drawing/2010/main" Requires="a14">
+      <mc:AlternateContent xmlns:mc="http://schemas.openxmlformats.org/markup-compatibility/2006" xmlns:a14="http://schemas.microsoft.com/office/drawing/2010/main">
+        <mc:Choice Requires="a14">
           <p:sp>
             <p:nvSpPr>
               <p:cNvPr id="3" name="Объект 2"/>
@@ -12246,11 +13130,7 @@
                 </a:pPr>
                 <a:r>
                   <a:rPr lang="ru-RU" sz="2400" dirty="0" smtClean="0"/>
-                  <a:t>Пусть мы хотим учитывать предыдущие </a:t>
-                </a:r>
-                <a:r>
-                  <a:rPr lang="ru-RU" sz="2400" dirty="0" smtClean="0"/>
-                  <a:t>состояние</a:t>
+                  <a:t>Пусть мы хотим учитывать предыдущие состояние</a:t>
                 </a:r>
                 <a:r>
                   <a:rPr lang="en-US" sz="2400" dirty="0" smtClean="0"/>
@@ -13292,11 +14172,7 @@
                 </a14:m>
                 <a:r>
                   <a:rPr lang="ru-RU" sz="2400" dirty="0" smtClean="0"/>
-                  <a:t> - коэффициенты </a:t>
-                </a:r>
-                <a:r>
-                  <a:rPr lang="ru-RU" sz="2400" dirty="0" smtClean="0"/>
-                  <a:t>слоя перехода от состояния </a:t>
+                  <a:t> - коэффициенты слоя перехода от состояния </a:t>
                 </a:r>
                 <a:r>
                   <a:rPr lang="en-US" sz="2400" dirty="0" smtClean="0"/>
@@ -13337,7 +14213,7 @@
             </p:txBody>
           </p:sp>
         </mc:Choice>
-        <mc:Fallback>
+        <mc:Fallback xmlns="">
           <p:sp>
             <p:nvSpPr>
               <p:cNvPr id="3" name="Объект 2"/>
@@ -13440,8 +14316,8 @@
           <a:chExt cx="0" cy="0"/>
         </a:xfrm>
       </p:grpSpPr>
-      <mc:AlternateContent xmlns:mc="http://schemas.openxmlformats.org/markup-compatibility/2006">
-        <mc:Choice xmlns:a14="http://schemas.microsoft.com/office/drawing/2010/main" Requires="a14">
+      <mc:AlternateContent xmlns:mc="http://schemas.openxmlformats.org/markup-compatibility/2006" xmlns:a14="http://schemas.microsoft.com/office/drawing/2010/main">
+        <mc:Choice Requires="a14">
           <p:sp>
             <p:nvSpPr>
               <p:cNvPr id="3" name="Объект 2"/>
@@ -13802,13 +14678,7 @@
                                     <a:rPr lang="en-US" sz="2200" i="1" dirty="0">
                                       <a:latin typeface="Cambria Math" panose="02040503050406030204" pitchFamily="18" charset="0"/>
                                     </a:rPr>
-                                    <m:t>=</m:t>
-                                  </m:r>
-                                  <m:r>
-                                    <a:rPr lang="en-US" sz="2200" i="1" dirty="0">
-                                      <a:latin typeface="Cambria Math" panose="02040503050406030204" pitchFamily="18" charset="0"/>
-                                    </a:rPr>
-                                    <m:t>1</m:t>
+                                    <m:t>=1</m:t>
                                   </m:r>
                                 </m:sub>
                                 <m:sup>
@@ -15114,7 +15984,6 @@
                 <a:endParaRPr lang="en-US" sz="2200" dirty="0" smtClean="0"/>
               </a:p>
               <a:p>
-                <a:pPr/>
                 <a:endParaRPr lang="ru-RU" sz="2200" dirty="0"/>
               </a:p>
               <a:p>
@@ -15126,7 +15995,7 @@
             </p:txBody>
           </p:sp>
         </mc:Choice>
-        <mc:Fallback>
+        <mc:Fallback xmlns="">
           <p:sp>
             <p:nvSpPr>
               <p:cNvPr id="3" name="Объект 2"/>
@@ -15467,12 +16336,11 @@
               <a:rPr lang="ru-RU" sz="1100" dirty="0"/>
               <a:t>https://d2l.ai/chapter_recurrent-neural-networks/rnn.html</a:t>
             </a:r>
-            <a:endParaRPr lang="ru-RU" sz="1100" dirty="0"/>
           </a:p>
         </p:txBody>
       </p:sp>
-      <mc:AlternateContent xmlns:mc="http://schemas.openxmlformats.org/markup-compatibility/2006">
-        <mc:Choice xmlns:a14="http://schemas.microsoft.com/office/drawing/2010/main" Requires="a14">
+      <mc:AlternateContent xmlns:mc="http://schemas.openxmlformats.org/markup-compatibility/2006" xmlns:a14="http://schemas.microsoft.com/office/drawing/2010/main">
+        <mc:Choice Requires="a14">
           <p:sp>
             <p:nvSpPr>
               <p:cNvPr id="16" name="Прямоугольник 15"/>
@@ -15494,6 +16362,7 @@
               </a:bodyPr>
               <a:lstStyle/>
               <a:p>
+                <a:pPr/>
                 <a14:m>
                   <m:oMathPara xmlns:m="http://schemas.openxmlformats.org/officeDocument/2006/math">
                     <m:oMathParaPr>
@@ -15870,7 +16739,7 @@
             </p:txBody>
           </p:sp>
         </mc:Choice>
-        <mc:Fallback>
+        <mc:Fallback xmlns="">
           <p:sp>
             <p:nvSpPr>
               <p:cNvPr id="16" name="Прямоугольник 15"/>
@@ -15960,11 +16829,11 @@
   <p:clrMapOvr>
     <a:masterClrMapping/>
   </p:clrMapOvr>
-  <mc:AlternateContent xmlns:mc="http://schemas.openxmlformats.org/markup-compatibility/2006">
-    <mc:Choice xmlns:p14="http://schemas.microsoft.com/office/powerpoint/2010/main" Requires="p14">
+  <mc:AlternateContent xmlns:mc="http://schemas.openxmlformats.org/markup-compatibility/2006" xmlns:p14="http://schemas.microsoft.com/office/powerpoint/2010/main">
+    <mc:Choice Requires="p14">
       <p:transition spd="slow" p14:dur="2000"/>
     </mc:Choice>
-    <mc:Fallback>
+    <mc:Fallback xmlns="">
       <p:transition spd="slow"/>
     </mc:Fallback>
   </mc:AlternateContent>
@@ -16017,7 +16886,7 @@
           </a:bodyPr>
           <a:lstStyle/>
           <a:p>
-            <a:pPr algn="l" rtl="0"/>
+            <a:pPr algn="ctr" rtl="0"/>
             <a:r>
               <a:rPr lang="en-US" b="1" dirty="0" smtClean="0"/>
               <a:t>RNN </a:t>
@@ -16030,8 +16899,8 @@
           </a:p>
         </p:txBody>
       </p:sp>
-      <mc:AlternateContent xmlns:mc="http://schemas.openxmlformats.org/markup-compatibility/2006">
-        <mc:Choice xmlns:a14="http://schemas.microsoft.com/office/drawing/2010/main" Requires="a14">
+      <mc:AlternateContent xmlns:mc="http://schemas.openxmlformats.org/markup-compatibility/2006" xmlns:a14="http://schemas.microsoft.com/office/drawing/2010/main">
+        <mc:Choice Requires="a14">
           <p:sp>
             <p:nvSpPr>
               <p:cNvPr id="3" name="Объект 2"/>
@@ -16318,7 +17187,7 @@
             </p:txBody>
           </p:sp>
         </mc:Choice>
-        <mc:Fallback>
+        <mc:Fallback xmlns="">
           <p:sp>
             <p:nvSpPr>
               <p:cNvPr id="3" name="Объект 2"/>
@@ -17052,11 +17921,11 @@
   <p:clrMapOvr>
     <a:masterClrMapping/>
   </p:clrMapOvr>
-  <mc:AlternateContent xmlns:mc="http://schemas.openxmlformats.org/markup-compatibility/2006">
-    <mc:Choice xmlns:p14="http://schemas.microsoft.com/office/powerpoint/2010/main" Requires="p14">
+  <mc:AlternateContent xmlns:mc="http://schemas.openxmlformats.org/markup-compatibility/2006" xmlns:p14="http://schemas.microsoft.com/office/powerpoint/2010/main">
+    <mc:Choice Requires="p14">
       <p:transition spd="slow" p14:dur="2000"/>
     </mc:Choice>
-    <mc:Fallback>
+    <mc:Fallback xmlns="">
       <p:transition spd="slow"/>
     </mc:Fallback>
   </mc:AlternateContent>
@@ -17109,7 +17978,7 @@
           </a:bodyPr>
           <a:lstStyle/>
           <a:p>
-            <a:pPr algn="l" rtl="0"/>
+            <a:pPr algn="ctr" rtl="0"/>
             <a:r>
               <a:rPr lang="en-US" b="1" dirty="0" smtClean="0"/>
               <a:t>RNN </a:t>
@@ -17307,11 +18176,11 @@
   <p:clrMapOvr>
     <a:masterClrMapping/>
   </p:clrMapOvr>
-  <mc:AlternateContent xmlns:mc="http://schemas.openxmlformats.org/markup-compatibility/2006">
-    <mc:Choice xmlns:p14="http://schemas.microsoft.com/office/powerpoint/2010/main" Requires="p14">
+  <mc:AlternateContent xmlns:mc="http://schemas.openxmlformats.org/markup-compatibility/2006" xmlns:p14="http://schemas.microsoft.com/office/powerpoint/2010/main">
+    <mc:Choice Requires="p14">
       <p:transition spd="slow" p14:dur="2000"/>
     </mc:Choice>
-    <mc:Fallback>
+    <mc:Fallback xmlns="">
       <p:transition spd="slow"/>
     </mc:Fallback>
   </mc:AlternateContent>
@@ -17364,13 +18233,10 @@
           </a:bodyPr>
           <a:lstStyle/>
           <a:p>
+            <a:pPr algn="ctr"/>
             <a:r>
               <a:rPr lang="en-US" b="1" dirty="0" smtClean="0"/>
-              <a:t>RNN</a:t>
-            </a:r>
-            <a:r>
-              <a:rPr lang="en-US" b="1" dirty="0" smtClean="0"/>
-              <a:t>. </a:t>
+              <a:t>RNN. </a:t>
             </a:r>
             <a:r>
               <a:rPr lang="ru-RU" b="1" dirty="0" smtClean="0"/>
@@ -18032,8 +18898,8 @@
           </a:p>
         </p:txBody>
       </p:sp>
-      <mc:AlternateContent xmlns:mc="http://schemas.openxmlformats.org/markup-compatibility/2006">
-        <mc:Choice xmlns:a14="http://schemas.microsoft.com/office/drawing/2010/main" Requires="a14">
+      <mc:AlternateContent xmlns:mc="http://schemas.openxmlformats.org/markup-compatibility/2006" xmlns:a14="http://schemas.microsoft.com/office/drawing/2010/main">
+        <mc:Choice Requires="a14">
           <p:sp>
             <p:nvSpPr>
               <p:cNvPr id="14" name="Объект 2"/>
@@ -18270,13 +19136,7 @@
                           <a:rPr lang="en-US" sz="3400" i="1" dirty="0">
                             <a:latin typeface="Cambria Math" panose="02040503050406030204" pitchFamily="18" charset="0"/>
                           </a:rPr>
-                          <m:t>,</m:t>
-                        </m:r>
-                        <m:r>
-                          <a:rPr lang="en-US" sz="3400" i="1" dirty="0">
-                            <a:latin typeface="Cambria Math" panose="02040503050406030204" pitchFamily="18" charset="0"/>
-                          </a:rPr>
-                          <m:t> (</m:t>
+                          <m:t>, (</m:t>
                         </m:r>
                         <m:sSub>
                           <m:sSubPr>
@@ -18541,13 +19401,7 @@
                       <a:rPr lang="en-US" sz="3400" i="1" dirty="0">
                         <a:latin typeface="Cambria Math" panose="02040503050406030204" pitchFamily="18" charset="0"/>
                       </a:rPr>
-                      <m:t>)</m:t>
-                    </m:r>
-                    <m:r>
-                      <a:rPr lang="en-US" sz="3400" i="1" dirty="0">
-                        <a:latin typeface="Cambria Math" panose="02040503050406030204" pitchFamily="18" charset="0"/>
-                      </a:rPr>
-                      <m:t>,</m:t>
+                      <m:t>),</m:t>
                     </m:r>
                   </m:oMath>
                 </a14:m>
@@ -18895,13 +19749,7 @@
                             <a:rPr lang="en-US" sz="3400" i="1" dirty="0">
                               <a:latin typeface="Cambria Math" panose="02040503050406030204" pitchFamily="18" charset="0"/>
                             </a:rPr>
-                            <m:t>,</m:t>
-                          </m:r>
-                          <m:r>
-                            <a:rPr lang="en-US" sz="3400" i="1" dirty="0">
-                              <a:latin typeface="Cambria Math" panose="02040503050406030204" pitchFamily="18" charset="0"/>
-                            </a:rPr>
-                            <m:t>(</m:t>
+                            <m:t>,(</m:t>
                           </m:r>
                           <m:sSub>
                             <m:sSubPr>
@@ -18975,13 +19823,7 @@
                             <a:rPr lang="en-US" sz="3400" i="1" dirty="0">
                               <a:latin typeface="Cambria Math" panose="02040503050406030204" pitchFamily="18" charset="0"/>
                             </a:rPr>
-                            <m:t>)</m:t>
-                          </m:r>
-                          <m:r>
-                            <a:rPr lang="en-US" sz="3400" i="1" dirty="0">
-                              <a:latin typeface="Cambria Math" panose="02040503050406030204" pitchFamily="18" charset="0"/>
-                            </a:rPr>
-                            <m:t>) </m:t>
+                            <m:t>)) </m:t>
                           </m:r>
                         </m:e>
                       </m:d>
@@ -19363,11 +20205,7 @@
                 </a14:m>
                 <a:r>
                   <a:rPr lang="ru-RU" sz="3400" dirty="0"/>
-                  <a:t> завесит от </a:t>
-                </a:r>
-                <a:r>
-                  <a:rPr lang="ru-RU" sz="3400" dirty="0"/>
-                  <a:t>от всех предыдущих состояний </a:t>
+                  <a:t> завесит от от всех предыдущих состояний </a:t>
                 </a:r>
                 <a14:m>
                   <m:oMath xmlns:m="http://schemas.openxmlformats.org/officeDocument/2006/math">
@@ -20200,7 +21038,7 @@
             </p:txBody>
           </p:sp>
         </mc:Choice>
-        <mc:Fallback>
+        <mc:Fallback xmlns="">
           <p:sp>
             <p:nvSpPr>
               <p:cNvPr id="14" name="Объект 2"/>
@@ -20297,11 +21135,11 @@
   <p:clrMapOvr>
     <a:masterClrMapping/>
   </p:clrMapOvr>
-  <mc:AlternateContent xmlns:mc="http://schemas.openxmlformats.org/markup-compatibility/2006">
-    <mc:Choice xmlns:p14="http://schemas.microsoft.com/office/powerpoint/2010/main" Requires="p14">
+  <mc:AlternateContent xmlns:mc="http://schemas.openxmlformats.org/markup-compatibility/2006" xmlns:p14="http://schemas.microsoft.com/office/powerpoint/2010/main">
+    <mc:Choice Requires="p14">
       <p:transition spd="slow" p14:dur="2000"/>
     </mc:Choice>
-    <mc:Fallback>
+    <mc:Fallback xmlns="">
       <p:transition spd="slow"/>
     </mc:Fallback>
   </mc:AlternateContent>
@@ -20375,8 +21213,8 @@
           </a:p>
         </p:txBody>
       </p:sp>
-      <mc:AlternateContent xmlns:mc="http://schemas.openxmlformats.org/markup-compatibility/2006">
-        <mc:Choice xmlns:a14="http://schemas.microsoft.com/office/drawing/2010/main" Requires="a14">
+      <mc:AlternateContent xmlns:mc="http://schemas.openxmlformats.org/markup-compatibility/2006" xmlns:a14="http://schemas.microsoft.com/office/drawing/2010/main">
+        <mc:Choice Requires="a14">
           <p:sp>
             <p:nvSpPr>
               <p:cNvPr id="3" name="Объект 2"/>
@@ -20500,11 +21338,7 @@
                 </a:r>
                 <a:r>
                   <a:rPr lang="en-US" sz="2200" b="1" dirty="0"/>
-                  <a:t>Truncated </a:t>
-                </a:r>
-                <a:r>
-                  <a:rPr lang="en-US" sz="2200" b="1" dirty="0"/>
-                  <a:t>Backpropagation</a:t>
+                  <a:t>Truncated Backpropagation</a:t>
                 </a:r>
                 <a:r>
                   <a:rPr lang="ru-RU" sz="2200" dirty="0"/>
@@ -21041,7 +21875,7 @@
             </p:txBody>
           </p:sp>
         </mc:Choice>
-        <mc:Fallback>
+        <mc:Fallback xmlns="">
           <p:sp>
             <p:nvSpPr>
               <p:cNvPr id="3" name="Объект 2"/>
@@ -21103,8 +21937,8 @@
           </a:prstGeom>
         </p:spPr>
       </p:pic>
-      <mc:AlternateContent xmlns:mc="http://schemas.openxmlformats.org/markup-compatibility/2006">
-        <mc:Choice xmlns:a14="http://schemas.microsoft.com/office/drawing/2010/main" Requires="a14">
+      <mc:AlternateContent xmlns:mc="http://schemas.openxmlformats.org/markup-compatibility/2006" xmlns:a14="http://schemas.microsoft.com/office/drawing/2010/main">
+        <mc:Choice Requires="a14">
           <p:sp>
             <p:nvSpPr>
               <p:cNvPr id="6" name="Прямоугольник 5"/>
@@ -21267,11 +22101,7 @@
                 </a:r>
                 <a:r>
                   <a:rPr lang="ru-RU" sz="2200" dirty="0"/>
-                  <a:t>). Отметим, что</a:t>
-                </a:r>
-                <a:r>
-                  <a:rPr lang="ru-RU" sz="2200" dirty="0"/>
-                  <a:t> </a:t>
+                  <a:t>). Отметим, что </a:t>
                 </a:r>
                 <a:r>
                   <a:rPr lang="ru-RU" sz="2200" dirty="0" err="1"/>
@@ -21287,21 +22117,13 @@
                 </a:r>
                 <a:r>
                   <a:rPr lang="ru-RU" sz="2200" dirty="0"/>
-                  <a:t> это довольно </a:t>
-                </a:r>
-                <a:r>
-                  <a:rPr lang="ru-RU" sz="2200" dirty="0"/>
-                  <a:t>грубый </a:t>
-                </a:r>
-                <a:r>
-                  <a:rPr lang="ru-RU" sz="2200" dirty="0"/>
-                  <a:t>инструмент</a:t>
+                  <a:t> это довольно грубый инструмент</a:t>
                 </a:r>
               </a:p>
             </p:txBody>
           </p:sp>
         </mc:Choice>
-        <mc:Fallback>
+        <mc:Fallback xmlns="">
           <p:sp>
             <p:nvSpPr>
               <p:cNvPr id="6" name="Прямоугольник 5"/>

--- a/2025/LEC/07-2 RNN.pptx
+++ b/2025/LEC/07-2 RNN.pptx
@@ -3711,11 +3711,7 @@
             </a:r>
             <a:r>
               <a:rPr lang="en-US" dirty="0" smtClean="0"/>
-              <a:t> </a:t>
-            </a:r>
-            <a:r>
-              <a:rPr lang="en-US" dirty="0" smtClean="0"/>
-              <a:t>RNN</a:t>
+              <a:t> RNN</a:t>
             </a:r>
             <a:endParaRPr lang="ru-RU" dirty="0"/>
           </a:p>
@@ -3850,13 +3846,7 @@
                             <a:rPr lang="en-US" sz="2000" i="1" dirty="0">
                               <a:latin typeface="Cambria Math" panose="02040503050406030204" pitchFamily="18" charset="0"/>
                             </a:rPr>
-                            <m:t>+</m:t>
-                          </m:r>
-                          <m:r>
-                            <a:rPr lang="en-US" sz="2000" i="1" dirty="0">
-                              <a:latin typeface="Cambria Math" panose="02040503050406030204" pitchFamily="18" charset="0"/>
-                            </a:rPr>
-                            <m:t>1</m:t>
+                            <m:t>+1</m:t>
                           </m:r>
                         </m:sub>
                         <m:sup>
@@ -4101,13 +4091,7 @@
                             <a:rPr lang="en-US" sz="2000" i="1" dirty="0">
                               <a:latin typeface="Cambria Math" panose="02040503050406030204" pitchFamily="18" charset="0"/>
                             </a:rPr>
-                            <m:t>+</m:t>
-                          </m:r>
-                          <m:r>
-                            <a:rPr lang="en-US" sz="2000" i="1" dirty="0">
-                              <a:latin typeface="Cambria Math" panose="02040503050406030204" pitchFamily="18" charset="0"/>
-                            </a:rPr>
-                            <m:t>1</m:t>
+                            <m:t>+1</m:t>
                           </m:r>
                         </m:sub>
                         <m:sup>
@@ -4348,13 +4332,7 @@
                           <a:rPr lang="en-US" sz="2000" i="1" dirty="0">
                             <a:latin typeface="Cambria Math" panose="02040503050406030204" pitchFamily="18" charset="0"/>
                           </a:rPr>
-                          <m:t>+</m:t>
-                        </m:r>
-                        <m:r>
-                          <a:rPr lang="en-US" sz="2000" i="1" dirty="0">
-                            <a:latin typeface="Cambria Math" panose="02040503050406030204" pitchFamily="18" charset="0"/>
-                          </a:rPr>
-                          <m:t>1</m:t>
+                          <m:t>+1</m:t>
                         </m:r>
                       </m:sub>
                     </m:sSub>
@@ -4391,13 +4369,7 @@
                           <a:rPr lang="en-US" sz="2000" i="1" dirty="0">
                             <a:latin typeface="Cambria Math" panose="02040503050406030204" pitchFamily="18" charset="0"/>
                           </a:rPr>
-                          <m:t>+</m:t>
-                        </m:r>
-                        <m:r>
-                          <a:rPr lang="en-US" sz="2000" i="1" dirty="0">
-                            <a:latin typeface="Cambria Math" panose="02040503050406030204" pitchFamily="18" charset="0"/>
-                          </a:rPr>
-                          <m:t>1</m:t>
+                          <m:t>+1</m:t>
                         </m:r>
                       </m:sub>
                       <m:sup>
@@ -4443,13 +4415,7 @@
                           <a:rPr lang="en-US" sz="2000" i="1" dirty="0">
                             <a:latin typeface="Cambria Math" panose="02040503050406030204" pitchFamily="18" charset="0"/>
                           </a:rPr>
-                          <m:t>+</m:t>
-                        </m:r>
-                        <m:r>
-                          <a:rPr lang="en-US" sz="2000" i="1" dirty="0">
-                            <a:latin typeface="Cambria Math" panose="02040503050406030204" pitchFamily="18" charset="0"/>
-                          </a:rPr>
-                          <m:t>1</m:t>
+                          <m:t>+1</m:t>
                         </m:r>
                       </m:sub>
                       <m:sup>
@@ -4758,13 +4724,7 @@
                           <a:rPr lang="en-US" sz="2000" i="1" dirty="0">
                             <a:latin typeface="Cambria Math" panose="02040503050406030204" pitchFamily="18" charset="0"/>
                           </a:rPr>
-                          <m:t>+</m:t>
-                        </m:r>
-                        <m:r>
-                          <a:rPr lang="en-US" sz="2000" i="1" dirty="0">
-                            <a:latin typeface="Cambria Math" panose="02040503050406030204" pitchFamily="18" charset="0"/>
-                          </a:rPr>
-                          <m:t>1</m:t>
+                          <m:t>+1</m:t>
                         </m:r>
                       </m:sub>
                       <m:sup>
@@ -4811,13 +4771,7 @@
                           <a:rPr lang="en-US" sz="2000" i="1" dirty="0">
                             <a:latin typeface="Cambria Math" panose="02040503050406030204" pitchFamily="18" charset="0"/>
                           </a:rPr>
-                          <m:t>+</m:t>
-                        </m:r>
-                        <m:r>
-                          <a:rPr lang="en-US" sz="2000" i="1" dirty="0">
-                            <a:latin typeface="Cambria Math" panose="02040503050406030204" pitchFamily="18" charset="0"/>
-                          </a:rPr>
-                          <m:t>1</m:t>
+                          <m:t>+1</m:t>
                         </m:r>
                       </m:sub>
                       <m:sup>
@@ -4878,13 +4832,7 @@
                           <a:rPr lang="en-US" sz="2000" i="1" dirty="0">
                             <a:latin typeface="Cambria Math" panose="02040503050406030204" pitchFamily="18" charset="0"/>
                           </a:rPr>
-                          <m:t>+</m:t>
-                        </m:r>
-                        <m:r>
-                          <a:rPr lang="en-US" sz="2000" i="1" dirty="0">
-                            <a:latin typeface="Cambria Math" panose="02040503050406030204" pitchFamily="18" charset="0"/>
-                          </a:rPr>
-                          <m:t>1</m:t>
+                          <m:t>+1</m:t>
                         </m:r>
                       </m:sub>
                       <m:sup>
@@ -10615,30 +10563,6 @@
           </a:p>
         </p:txBody>
       </p:sp>
-      <p:pic>
-        <p:nvPicPr>
-          <p:cNvPr id="6" name="Рисунок 5"/>
-          <p:cNvPicPr>
-            <a:picLocks noChangeAspect="1"/>
-          </p:cNvPicPr>
-          <p:nvPr/>
-        </p:nvPicPr>
-        <p:blipFill>
-          <a:blip r:embed="rId2"/>
-          <a:stretch>
-            <a:fillRect/>
-          </a:stretch>
-        </p:blipFill>
-        <p:spPr>
-          <a:xfrm>
-            <a:off x="6649406" y="4241025"/>
-            <a:ext cx="5514096" cy="1409700"/>
-          </a:xfrm>
-          <a:prstGeom prst="rect">
-            <a:avLst/>
-          </a:prstGeom>
-        </p:spPr>
-      </p:pic>
       <p:sp>
         <p:nvSpPr>
           <p:cNvPr id="7" name="Прямоугольник 6"/>
@@ -10647,8 +10571,8 @@
         </p:nvSpPr>
         <p:spPr>
           <a:xfrm>
-            <a:off x="6535487" y="6455745"/>
-            <a:ext cx="4365041" cy="369332"/>
+            <a:off x="8838098" y="6511151"/>
+            <a:ext cx="2971583" cy="276999"/>
           </a:xfrm>
           <a:prstGeom prst="rect">
             <a:avLst/>
@@ -10661,10 +10585,10 @@
           <a:lstStyle/>
           <a:p>
             <a:r>
-              <a:rPr lang="en-US" dirty="0"/>
+              <a:rPr lang="en-US" sz="1200" dirty="0"/>
               <a:t>https://ar5iv.labs.arxiv.org/html/1907.03329</a:t>
             </a:r>
-            <a:endParaRPr lang="ru-RU" dirty="0"/>
+            <a:endParaRPr lang="ru-RU" sz="1200" dirty="0"/>
           </a:p>
         </p:txBody>
       </p:sp>
@@ -10677,7 +10601,7 @@
           <p:nvPr/>
         </p:nvPicPr>
         <p:blipFill>
-          <a:blip r:embed="rId3" cstate="hqprint">
+          <a:blip r:embed="rId2" cstate="hqprint">
             <a:extLst>
               <a:ext uri="{28A0092B-C50C-407E-A947-70E740481C1C}">
                 <a14:useLocalDpi xmlns:a14="http://schemas.microsoft.com/office/drawing/2010/main" val="0"/>
@@ -10691,8 +10615,8 @@
         </p:blipFill>
         <p:spPr bwMode="auto">
           <a:xfrm>
-            <a:off x="6612108" y="253177"/>
-            <a:ext cx="5197574" cy="3648899"/>
+            <a:off x="6924908" y="2995735"/>
+            <a:ext cx="5007437" cy="3515416"/>
           </a:xfrm>
           <a:prstGeom prst="rect">
             <a:avLst/>
@@ -10733,6 +10657,58 @@
             <a:r>
               <a:rPr lang="ru-RU" sz="1200" dirty="0"/>
               <a:t>https://www.sciencedirect.com/science/article/abs/pii/S0169207019301153</a:t>
+            </a:r>
+          </a:p>
+        </p:txBody>
+      </p:sp>
+      <p:pic>
+        <p:nvPicPr>
+          <p:cNvPr id="8" name="Рисунок 7"/>
+          <p:cNvPicPr>
+            <a:picLocks noChangeAspect="1"/>
+          </p:cNvPicPr>
+          <p:nvPr/>
+        </p:nvPicPr>
+        <p:blipFill>
+          <a:blip r:embed="rId3"/>
+          <a:stretch>
+            <a:fillRect/>
+          </a:stretch>
+        </p:blipFill>
+        <p:spPr>
+          <a:xfrm>
+            <a:off x="6372859" y="160338"/>
+            <a:ext cx="5689044" cy="2720074"/>
+          </a:xfrm>
+          <a:prstGeom prst="rect">
+            <a:avLst/>
+          </a:prstGeom>
+        </p:spPr>
+      </p:pic>
+      <p:sp>
+        <p:nvSpPr>
+          <p:cNvPr id="9" name="Прямоугольник 8"/>
+          <p:cNvSpPr/>
+          <p:nvPr/>
+        </p:nvSpPr>
+        <p:spPr>
+          <a:xfrm>
+            <a:off x="5055220" y="6434206"/>
+            <a:ext cx="6096000" cy="430887"/>
+          </a:xfrm>
+          <a:prstGeom prst="rect">
+            <a:avLst/>
+          </a:prstGeom>
+        </p:spPr>
+        <p:txBody>
+          <a:bodyPr>
+            <a:spAutoFit/>
+          </a:bodyPr>
+          <a:lstStyle/>
+          <a:p>
+            <a:r>
+              <a:rPr lang="ru-RU" sz="1050" dirty="0"/>
+              <a:t>https://isf.forecasters.org/wp-content/uploads/gravity_forms/2-dd30f7ae09136fa695c552259bdb3f99/2019/06/M4.pdf</a:t>
             </a:r>
           </a:p>
         </p:txBody>
@@ -12646,13 +12622,7 @@
                           <a:rPr lang="en-US" sz="2400" b="0" i="1" dirty="0" smtClean="0">
                             <a:latin typeface="Cambria Math" panose="02040503050406030204" pitchFamily="18" charset="0"/>
                           </a:rPr>
-                          <m:t>+</m:t>
-                        </m:r>
-                        <m:r>
-                          <a:rPr lang="en-US" sz="2400" b="0" i="1" dirty="0" smtClean="0">
-                            <a:latin typeface="Cambria Math" panose="02040503050406030204" pitchFamily="18" charset="0"/>
-                          </a:rPr>
-                          <m:t>1</m:t>
+                          <m:t>+1</m:t>
                         </m:r>
                       </m:sub>
                     </m:sSub>
@@ -12686,13 +12656,7 @@
                           <a:rPr lang="en-US" sz="2400" b="0" i="1" dirty="0" smtClean="0">
                             <a:latin typeface="Cambria Math" panose="02040503050406030204" pitchFamily="18" charset="0"/>
                           </a:rPr>
-                          <m:t>=</m:t>
-                        </m:r>
-                        <m:r>
-                          <a:rPr lang="en-US" sz="2400" b="0" i="1" dirty="0" smtClean="0">
-                            <a:latin typeface="Cambria Math" panose="02040503050406030204" pitchFamily="18" charset="0"/>
-                          </a:rPr>
-                          <m:t>0</m:t>
+                          <m:t>=0</m:t>
                         </m:r>
                       </m:sub>
                       <m:sup>
@@ -12795,13 +12759,7 @@
                                   <a:rPr lang="en-US" sz="2400" b="0" i="1" dirty="0" smtClean="0">
                                     <a:latin typeface="Cambria Math" panose="02040503050406030204" pitchFamily="18" charset="0"/>
                                   </a:rPr>
-                                  <m:t>=</m:t>
-                                </m:r>
-                                <m:r>
-                                  <a:rPr lang="en-US" sz="2400" b="0" i="1" dirty="0" smtClean="0">
-                                    <a:latin typeface="Cambria Math" panose="02040503050406030204" pitchFamily="18" charset="0"/>
-                                  </a:rPr>
-                                  <m:t>0</m:t>
+                                  <m:t>=0</m:t>
                                 </m:r>
                               </m:sub>
                               <m:sup>
@@ -13226,13 +13184,7 @@
                           <a:rPr lang="en-US" sz="2400" i="1" dirty="0">
                             <a:latin typeface="Cambria Math" panose="02040503050406030204" pitchFamily="18" charset="0"/>
                           </a:rPr>
-                          <m:t>+</m:t>
-                        </m:r>
-                        <m:r>
-                          <a:rPr lang="en-US" sz="2400" i="1" dirty="0">
-                            <a:latin typeface="Cambria Math" panose="02040503050406030204" pitchFamily="18" charset="0"/>
-                          </a:rPr>
-                          <m:t>1</m:t>
+                          <m:t>+1</m:t>
                         </m:r>
                       </m:sub>
                     </m:sSub>
@@ -13664,13 +13616,7 @@
                           <a:rPr lang="en-US" sz="2400" i="1" dirty="0">
                             <a:latin typeface="Cambria Math" panose="02040503050406030204" pitchFamily="18" charset="0"/>
                           </a:rPr>
-                          <m:t>+</m:t>
-                        </m:r>
-                        <m:r>
-                          <a:rPr lang="en-US" sz="2400" i="1" dirty="0">
-                            <a:latin typeface="Cambria Math" panose="02040503050406030204" pitchFamily="18" charset="0"/>
-                          </a:rPr>
-                          <m:t>1</m:t>
+                          <m:t>+1</m:t>
                         </m:r>
                       </m:sub>
                     </m:sSub>
@@ -13704,13 +13650,7 @@
                           <a:rPr lang="en-US" sz="2400" i="1" dirty="0">
                             <a:latin typeface="Cambria Math" panose="02040503050406030204" pitchFamily="18" charset="0"/>
                           </a:rPr>
-                          <m:t>=</m:t>
-                        </m:r>
-                        <m:r>
-                          <a:rPr lang="en-US" sz="2400" i="1" dirty="0">
-                            <a:latin typeface="Cambria Math" panose="02040503050406030204" pitchFamily="18" charset="0"/>
-                          </a:rPr>
-                          <m:t>0</m:t>
+                          <m:t>=0</m:t>
                         </m:r>
                       </m:sub>
                       <m:sup>
@@ -14194,13 +14134,7 @@
                       <a:rPr lang="en-US" sz="2400" i="1" dirty="0" smtClean="0">
                         <a:latin typeface="Cambria Math" panose="02040503050406030204" pitchFamily="18" charset="0"/>
                       </a:rPr>
-                      <m:t>+</m:t>
-                    </m:r>
-                    <m:r>
-                      <a:rPr lang="en-US" sz="2400" i="1" dirty="0" smtClean="0">
-                        <a:latin typeface="Cambria Math" panose="02040503050406030204" pitchFamily="18" charset="0"/>
-                      </a:rPr>
-                      <m:t>1</m:t>
+                      <m:t>+1</m:t>
                     </m:r>
                   </m:oMath>
                 </a14:m>
@@ -21416,7 +21350,13 @@
                               <a:rPr lang="en-US" sz="2200" i="1" dirty="0">
                                 <a:latin typeface="Cambria Math" panose="02040503050406030204" pitchFamily="18" charset="0"/>
                               </a:rPr>
-                              <m:t>+1</m:t>
+                              <m:t>+</m:t>
+                            </m:r>
+                            <m:r>
+                              <a:rPr lang="en-US" sz="2200" i="1" dirty="0">
+                                <a:latin typeface="Cambria Math" panose="02040503050406030204" pitchFamily="18" charset="0"/>
+                              </a:rPr>
+                              <m:t>1</m:t>
                             </m:r>
                           </m:sub>
                         </m:sSub>
@@ -21861,7 +21801,19 @@
                                 <a:rPr lang="en-US" sz="2200" i="1" dirty="0">
                                   <a:latin typeface="Cambria Math" panose="02040503050406030204" pitchFamily="18" charset="0"/>
                                 </a:rPr>
-                                <m:t>𝑜𝑡h𝑒𝑟𝑤𝑖𝑠𝑒</m:t>
+                                <m:t>𝑜𝑡</m:t>
+                              </m:r>
+                              <m:r>
+                                <a:rPr lang="en-US" sz="2200" i="1" dirty="0">
+                                  <a:latin typeface="Cambria Math" panose="02040503050406030204" pitchFamily="18" charset="0"/>
+                                </a:rPr>
+                                <m:t>h</m:t>
+                              </m:r>
+                              <m:r>
+                                <a:rPr lang="en-US" sz="2200" i="1" dirty="0">
+                                  <a:latin typeface="Cambria Math" panose="02040503050406030204" pitchFamily="18" charset="0"/>
+                                </a:rPr>
+                                <m:t>𝑒𝑟𝑤𝑖𝑠𝑒</m:t>
                               </m:r>
                             </m:e>
                           </m:eqArr>
